--- a/Day 2 Part 2/D2P2.pptx
+++ b/Day 2 Part 2/D2P2.pptx
@@ -299,7 +299,7 @@
 <file path=ppt/revisionInfo.xml><?xml version="1.0" encoding="utf-8"?>
 <p1510:revInfo xmlns:a="http://schemas.openxmlformats.org/drawingml/2006/main" xmlns:r="http://schemas.openxmlformats.org/officeDocument/2006/relationships" xmlns:p1510="http://schemas.microsoft.com/office/powerpoint/2015/10/main">
   <p1510:revLst>
-    <p1510:client id="{25EEF54F-CAED-44AF-9551-1880997A270E}" v="12" dt="2026-01-12T06:23:55.120"/>
+    <p1510:client id="{ADB41970-3D76-44B5-A3FE-07274F98D8DC}" v="1" dt="2026-03-15T14:25:37.795"/>
   </p1510:revLst>
 </p1510:revInfo>
 </file>
@@ -309,457 +309,55 @@
   <pc:docChgLst>
     <pc:chgData name="Matthieu De Mari" userId="dfb708c9-d8dc-439f-9a3b-c772bf4a311c" providerId="ADAL" clId="{81E9B007-0C2C-493E-9B93-55A62C9C1F12}"/>
     <pc:docChg chg="undo custSel addSld delSld modSld delSection modSection">
-      <pc:chgData name="Matthieu De Mari" userId="dfb708c9-d8dc-439f-9a3b-c772bf4a311c" providerId="ADAL" clId="{81E9B007-0C2C-493E-9B93-55A62C9C1F12}" dt="2026-01-12T06:24:03.687" v="484" actId="20577"/>
+      <pc:chgData name="Matthieu De Mari" userId="dfb708c9-d8dc-439f-9a3b-c772bf4a311c" providerId="ADAL" clId="{81E9B007-0C2C-493E-9B93-55A62C9C1F12}" dt="2026-03-15T14:26:11.675" v="545" actId="20577"/>
       <pc:docMkLst>
         <pc:docMk/>
       </pc:docMkLst>
       <pc:sldChg chg="modSp mod">
-        <pc:chgData name="Matthieu De Mari" userId="dfb708c9-d8dc-439f-9a3b-c772bf4a311c" providerId="ADAL" clId="{81E9B007-0C2C-493E-9B93-55A62C9C1F12}" dt="2026-01-12T06:08:53.221" v="8" actId="20577"/>
+        <pc:chgData name="Matthieu De Mari" userId="dfb708c9-d8dc-439f-9a3b-c772bf4a311c" providerId="ADAL" clId="{81E9B007-0C2C-493E-9B93-55A62C9C1F12}" dt="2026-03-15T14:25:49.806" v="511" actId="1076"/>
         <pc:sldMkLst>
           <pc:docMk/>
-          <pc:sldMk cId="1040156172" sldId="377"/>
+          <pc:sldMk cId="1513778887" sldId="424"/>
         </pc:sldMkLst>
         <pc:spChg chg="mod">
-          <ac:chgData name="Matthieu De Mari" userId="dfb708c9-d8dc-439f-9a3b-c772bf4a311c" providerId="ADAL" clId="{81E9B007-0C2C-493E-9B93-55A62C9C1F12}" dt="2026-01-12T06:08:53.221" v="8" actId="20577"/>
+          <ac:chgData name="Matthieu De Mari" userId="dfb708c9-d8dc-439f-9a3b-c772bf4a311c" providerId="ADAL" clId="{81E9B007-0C2C-493E-9B93-55A62C9C1F12}" dt="2026-03-15T14:25:36.516" v="505" actId="27636"/>
           <ac:spMkLst>
             <pc:docMk/>
-            <pc:sldMk cId="1040156172" sldId="377"/>
-            <ac:spMk id="2" creationId="{080CEB46-CC16-4D19-8C2C-AEE9471D8168}"/>
+            <pc:sldMk cId="1513778887" sldId="424"/>
+            <ac:spMk id="3" creationId="{FA1F1CE6-06FF-6DD6-265C-39A26CC7DB57}"/>
           </ac:spMkLst>
         </pc:spChg>
-      </pc:sldChg>
-      <pc:sldChg chg="modSp mod">
-        <pc:chgData name="Matthieu De Mari" userId="dfb708c9-d8dc-439f-9a3b-c772bf4a311c" providerId="ADAL" clId="{81E9B007-0C2C-493E-9B93-55A62C9C1F12}" dt="2025-12-18T22:17:52.423" v="0" actId="20577"/>
-        <pc:sldMkLst>
-          <pc:docMk/>
-          <pc:sldMk cId="380766058" sldId="378"/>
-        </pc:sldMkLst>
         <pc:spChg chg="mod">
-          <ac:chgData name="Matthieu De Mari" userId="dfb708c9-d8dc-439f-9a3b-c772bf4a311c" providerId="ADAL" clId="{81E9B007-0C2C-493E-9B93-55A62C9C1F12}" dt="2025-12-18T22:17:52.423" v="0" actId="20577"/>
+          <ac:chgData name="Matthieu De Mari" userId="dfb708c9-d8dc-439f-9a3b-c772bf4a311c" providerId="ADAL" clId="{81E9B007-0C2C-493E-9B93-55A62C9C1F12}" dt="2026-03-15T14:25:48.138" v="510" actId="20577"/>
           <ac:spMkLst>
             <pc:docMk/>
-            <pc:sldMk cId="380766058" sldId="378"/>
-            <ac:spMk id="3" creationId="{65399E50-9E84-8D67-B55F-073C06C3D10E}"/>
-          </ac:spMkLst>
-        </pc:spChg>
-      </pc:sldChg>
-      <pc:sldChg chg="del">
-        <pc:chgData name="Matthieu De Mari" userId="dfb708c9-d8dc-439f-9a3b-c772bf4a311c" providerId="ADAL" clId="{81E9B007-0C2C-493E-9B93-55A62C9C1F12}" dt="2026-01-12T06:11:14.624" v="33" actId="47"/>
-        <pc:sldMkLst>
-          <pc:docMk/>
-          <pc:sldMk cId="3251402422" sldId="381"/>
-        </pc:sldMkLst>
-      </pc:sldChg>
-      <pc:sldChg chg="modSp mod">
-        <pc:chgData name="Matthieu De Mari" userId="dfb708c9-d8dc-439f-9a3b-c772bf4a311c" providerId="ADAL" clId="{81E9B007-0C2C-493E-9B93-55A62C9C1F12}" dt="2026-01-12T06:11:53.956" v="43" actId="27636"/>
-        <pc:sldMkLst>
-          <pc:docMk/>
-          <pc:sldMk cId="1921397945" sldId="383"/>
-        </pc:sldMkLst>
-        <pc:spChg chg="mod">
-          <ac:chgData name="Matthieu De Mari" userId="dfb708c9-d8dc-439f-9a3b-c772bf4a311c" providerId="ADAL" clId="{81E9B007-0C2C-493E-9B93-55A62C9C1F12}" dt="2026-01-12T06:11:53.956" v="43" actId="27636"/>
-          <ac:spMkLst>
-            <pc:docMk/>
-            <pc:sldMk cId="1921397945" sldId="383"/>
-            <ac:spMk id="3" creationId="{4E3EB5A2-1EBE-6555-85E5-4CA6DEF3845D}"/>
-          </ac:spMkLst>
-        </pc:spChg>
-      </pc:sldChg>
-      <pc:sldChg chg="modSp add mod">
-        <pc:chgData name="Matthieu De Mari" userId="dfb708c9-d8dc-439f-9a3b-c772bf4a311c" providerId="ADAL" clId="{81E9B007-0C2C-493E-9B93-55A62C9C1F12}" dt="2026-01-12T06:16:47.680" v="220" actId="20577"/>
-        <pc:sldMkLst>
-          <pc:docMk/>
-          <pc:sldMk cId="2474697269" sldId="387"/>
-        </pc:sldMkLst>
-        <pc:spChg chg="mod">
-          <ac:chgData name="Matthieu De Mari" userId="dfb708c9-d8dc-439f-9a3b-c772bf4a311c" providerId="ADAL" clId="{81E9B007-0C2C-493E-9B93-55A62C9C1F12}" dt="2026-01-12T06:16:47.680" v="220" actId="20577"/>
-          <ac:spMkLst>
-            <pc:docMk/>
-            <pc:sldMk cId="2474697269" sldId="387"/>
-            <ac:spMk id="3" creationId="{C7732CA9-163D-B4B0-71B2-AEA1EC81E0E6}"/>
-          </ac:spMkLst>
-        </pc:spChg>
-      </pc:sldChg>
-      <pc:sldChg chg="add">
-        <pc:chgData name="Matthieu De Mari" userId="dfb708c9-d8dc-439f-9a3b-c772bf4a311c" providerId="ADAL" clId="{81E9B007-0C2C-493E-9B93-55A62C9C1F12}" dt="2026-01-12T06:17:23.137" v="222"/>
-        <pc:sldMkLst>
-          <pc:docMk/>
-          <pc:sldMk cId="4198773114" sldId="388"/>
-        </pc:sldMkLst>
-      </pc:sldChg>
-      <pc:sldChg chg="modSp add mod">
-        <pc:chgData name="Matthieu De Mari" userId="dfb708c9-d8dc-439f-9a3b-c772bf4a311c" providerId="ADAL" clId="{81E9B007-0C2C-493E-9B93-55A62C9C1F12}" dt="2026-01-12T06:18:41.781" v="411" actId="20577"/>
-        <pc:sldMkLst>
-          <pc:docMk/>
-          <pc:sldMk cId="481628505" sldId="389"/>
-        </pc:sldMkLst>
-        <pc:spChg chg="mod">
-          <ac:chgData name="Matthieu De Mari" userId="dfb708c9-d8dc-439f-9a3b-c772bf4a311c" providerId="ADAL" clId="{81E9B007-0C2C-493E-9B93-55A62C9C1F12}" dt="2026-01-12T06:18:41.781" v="411" actId="20577"/>
-          <ac:spMkLst>
-            <pc:docMk/>
-            <pc:sldMk cId="481628505" sldId="389"/>
-            <ac:spMk id="3" creationId="{6C4142A3-3578-C842-742A-3495AD72B776}"/>
-          </ac:spMkLst>
-        </pc:spChg>
-      </pc:sldChg>
-      <pc:sldChg chg="add">
-        <pc:chgData name="Matthieu De Mari" userId="dfb708c9-d8dc-439f-9a3b-c772bf4a311c" providerId="ADAL" clId="{81E9B007-0C2C-493E-9B93-55A62C9C1F12}" dt="2026-01-12T06:20:02.171" v="418"/>
-        <pc:sldMkLst>
-          <pc:docMk/>
-          <pc:sldMk cId="2128707751" sldId="390"/>
-        </pc:sldMkLst>
-      </pc:sldChg>
-      <pc:sldChg chg="del">
-        <pc:chgData name="Matthieu De Mari" userId="dfb708c9-d8dc-439f-9a3b-c772bf4a311c" providerId="ADAL" clId="{81E9B007-0C2C-493E-9B93-55A62C9C1F12}" dt="2026-01-12T06:14:36.776" v="213" actId="47"/>
-        <pc:sldMkLst>
-          <pc:docMk/>
-          <pc:sldMk cId="3140288791" sldId="404"/>
-        </pc:sldMkLst>
-      </pc:sldChg>
-      <pc:sldChg chg="del">
-        <pc:chgData name="Matthieu De Mari" userId="dfb708c9-d8dc-439f-9a3b-c772bf4a311c" providerId="ADAL" clId="{81E9B007-0C2C-493E-9B93-55A62C9C1F12}" dt="2026-01-12T06:10:29.651" v="28" actId="47"/>
-        <pc:sldMkLst>
-          <pc:docMk/>
-          <pc:sldMk cId="481166971" sldId="415"/>
-        </pc:sldMkLst>
-      </pc:sldChg>
-      <pc:sldChg chg="modSp mod">
-        <pc:chgData name="Matthieu De Mari" userId="dfb708c9-d8dc-439f-9a3b-c772bf4a311c" providerId="ADAL" clId="{81E9B007-0C2C-493E-9B93-55A62C9C1F12}" dt="2026-01-12T06:10:38.474" v="30" actId="27636"/>
-        <pc:sldMkLst>
-          <pc:docMk/>
-          <pc:sldMk cId="4050702309" sldId="416"/>
-        </pc:sldMkLst>
-        <pc:spChg chg="mod">
-          <ac:chgData name="Matthieu De Mari" userId="dfb708c9-d8dc-439f-9a3b-c772bf4a311c" providerId="ADAL" clId="{81E9B007-0C2C-493E-9B93-55A62C9C1F12}" dt="2026-01-12T06:10:38.474" v="30" actId="27636"/>
-          <ac:spMkLst>
-            <pc:docMk/>
-            <pc:sldMk cId="4050702309" sldId="416"/>
-            <ac:spMk id="5" creationId="{60D93335-8A92-D60B-8902-7A5CD0AD4E90}"/>
-          </ac:spMkLst>
-        </pc:spChg>
-      </pc:sldChg>
-      <pc:sldChg chg="modSp mod">
-        <pc:chgData name="Matthieu De Mari" userId="dfb708c9-d8dc-439f-9a3b-c772bf4a311c" providerId="ADAL" clId="{81E9B007-0C2C-493E-9B93-55A62C9C1F12}" dt="2026-01-12T06:10:44.572" v="32" actId="27636"/>
-        <pc:sldMkLst>
-          <pc:docMk/>
-          <pc:sldMk cId="4249457938" sldId="417"/>
-        </pc:sldMkLst>
-        <pc:spChg chg="mod">
-          <ac:chgData name="Matthieu De Mari" userId="dfb708c9-d8dc-439f-9a3b-c772bf4a311c" providerId="ADAL" clId="{81E9B007-0C2C-493E-9B93-55A62C9C1F12}" dt="2026-01-12T06:10:44.572" v="32" actId="27636"/>
-          <ac:spMkLst>
-            <pc:docMk/>
-            <pc:sldMk cId="4249457938" sldId="417"/>
-            <ac:spMk id="5" creationId="{60D93335-8A92-D60B-8902-7A5CD0AD4E90}"/>
-          </ac:spMkLst>
-        </pc:spChg>
-      </pc:sldChg>
-      <pc:sldChg chg="del">
-        <pc:chgData name="Matthieu De Mari" userId="dfb708c9-d8dc-439f-9a3b-c772bf4a311c" providerId="ADAL" clId="{81E9B007-0C2C-493E-9B93-55A62C9C1F12}" dt="2026-01-12T06:11:14.624" v="33" actId="47"/>
-        <pc:sldMkLst>
-          <pc:docMk/>
-          <pc:sldMk cId="346749718" sldId="421"/>
-        </pc:sldMkLst>
-      </pc:sldChg>
-      <pc:sldChg chg="del">
-        <pc:chgData name="Matthieu De Mari" userId="dfb708c9-d8dc-439f-9a3b-c772bf4a311c" providerId="ADAL" clId="{81E9B007-0C2C-493E-9B93-55A62C9C1F12}" dt="2026-01-12T06:11:14.624" v="33" actId="47"/>
-        <pc:sldMkLst>
-          <pc:docMk/>
-          <pc:sldMk cId="2747530419" sldId="422"/>
-        </pc:sldMkLst>
-      </pc:sldChg>
-      <pc:sldChg chg="modSp add mod">
-        <pc:chgData name="Matthieu De Mari" userId="dfb708c9-d8dc-439f-9a3b-c772bf4a311c" providerId="ADAL" clId="{81E9B007-0C2C-493E-9B93-55A62C9C1F12}" dt="2026-01-12T06:24:03.687" v="484" actId="20577"/>
-        <pc:sldMkLst>
-          <pc:docMk/>
-          <pc:sldMk cId="4272836236" sldId="548"/>
-        </pc:sldMkLst>
-        <pc:spChg chg="mod">
-          <ac:chgData name="Matthieu De Mari" userId="dfb708c9-d8dc-439f-9a3b-c772bf4a311c" providerId="ADAL" clId="{81E9B007-0C2C-493E-9B93-55A62C9C1F12}" dt="2026-01-12T06:24:03.687" v="484" actId="20577"/>
-          <ac:spMkLst>
-            <pc:docMk/>
-            <pc:sldMk cId="4272836236" sldId="548"/>
-            <ac:spMk id="5" creationId="{8784BD3C-A362-227F-DB67-10CF1E267B66}"/>
-          </ac:spMkLst>
-        </pc:spChg>
-      </pc:sldChg>
-      <pc:sldChg chg="addSp modSp mod">
-        <pc:chgData name="Matthieu De Mari" userId="dfb708c9-d8dc-439f-9a3b-c772bf4a311c" providerId="ADAL" clId="{81E9B007-0C2C-493E-9B93-55A62C9C1F12}" dt="2026-01-12T06:13:04.540" v="202" actId="20577"/>
-        <pc:sldMkLst>
-          <pc:docMk/>
-          <pc:sldMk cId="1172112343" sldId="648"/>
-        </pc:sldMkLst>
-        <pc:spChg chg="add mod">
-          <ac:chgData name="Matthieu De Mari" userId="dfb708c9-d8dc-439f-9a3b-c772bf4a311c" providerId="ADAL" clId="{81E9B007-0C2C-493E-9B93-55A62C9C1F12}" dt="2026-01-12T06:13:04.540" v="202" actId="20577"/>
-          <ac:spMkLst>
-            <pc:docMk/>
-            <pc:sldMk cId="1172112343" sldId="648"/>
-            <ac:spMk id="3" creationId="{07143808-71E3-C715-11DB-3C104EC1545F}"/>
+            <pc:sldMk cId="1513778887" sldId="424"/>
+            <ac:spMk id="4" creationId="{E64791F5-A404-78DF-C026-D4C294EB6D13}"/>
           </ac:spMkLst>
         </pc:spChg>
         <pc:picChg chg="mod">
-          <ac:chgData name="Matthieu De Mari" userId="dfb708c9-d8dc-439f-9a3b-c772bf4a311c" providerId="ADAL" clId="{81E9B007-0C2C-493E-9B93-55A62C9C1F12}" dt="2026-01-12T06:13:00.356" v="200" actId="1076"/>
+          <ac:chgData name="Matthieu De Mari" userId="dfb708c9-d8dc-439f-9a3b-c772bf4a311c" providerId="ADAL" clId="{81E9B007-0C2C-493E-9B93-55A62C9C1F12}" dt="2026-03-15T14:25:49.806" v="511" actId="1076"/>
           <ac:picMkLst>
             <pc:docMk/>
-            <pc:sldMk cId="1172112343" sldId="648"/>
-            <ac:picMk id="7" creationId="{24CC0564-4705-2D37-8595-2DA1E59BE29D}"/>
+            <pc:sldMk cId="1513778887" sldId="424"/>
+            <ac:picMk id="8" creationId="{65211D6B-6ABB-A3D9-3EA0-559457E53E30}"/>
           </ac:picMkLst>
         </pc:picChg>
       </pc:sldChg>
       <pc:sldChg chg="modSp mod">
-        <pc:chgData name="Matthieu De Mari" userId="dfb708c9-d8dc-439f-9a3b-c772bf4a311c" providerId="ADAL" clId="{81E9B007-0C2C-493E-9B93-55A62C9C1F12}" dt="2026-01-12T06:13:35.482" v="212" actId="20577"/>
+        <pc:chgData name="Matthieu De Mari" userId="dfb708c9-d8dc-439f-9a3b-c772bf4a311c" providerId="ADAL" clId="{81E9B007-0C2C-493E-9B93-55A62C9C1F12}" dt="2026-03-15T14:26:11.675" v="545" actId="20577"/>
         <pc:sldMkLst>
           <pc:docMk/>
-          <pc:sldMk cId="1146881653" sldId="649"/>
+          <pc:sldMk cId="3471904534" sldId="647"/>
         </pc:sldMkLst>
         <pc:spChg chg="mod">
-          <ac:chgData name="Matthieu De Mari" userId="dfb708c9-d8dc-439f-9a3b-c772bf4a311c" providerId="ADAL" clId="{81E9B007-0C2C-493E-9B93-55A62C9C1F12}" dt="2026-01-12T06:13:35.482" v="212" actId="20577"/>
+          <ac:chgData name="Matthieu De Mari" userId="dfb708c9-d8dc-439f-9a3b-c772bf4a311c" providerId="ADAL" clId="{81E9B007-0C2C-493E-9B93-55A62C9C1F12}" dt="2026-03-15T14:26:11.675" v="545" actId="20577"/>
           <ac:spMkLst>
             <pc:docMk/>
-            <pc:sldMk cId="1146881653" sldId="649"/>
+            <pc:sldMk cId="3471904534" sldId="647"/>
             <ac:spMk id="3" creationId="{DC9D8363-826B-D189-78FB-CCD945BC5477}"/>
           </ac:spMkLst>
         </pc:spChg>
-      </pc:sldChg>
-      <pc:sldChg chg="modSp mod">
-        <pc:chgData name="Matthieu De Mari" userId="dfb708c9-d8dc-439f-9a3b-c772bf4a311c" providerId="ADAL" clId="{81E9B007-0C2C-493E-9B93-55A62C9C1F12}" dt="2026-01-12T06:09:08.573" v="27" actId="20577"/>
-        <pc:sldMkLst>
-          <pc:docMk/>
-          <pc:sldMk cId="2917324732" sldId="760"/>
-        </pc:sldMkLst>
-        <pc:spChg chg="mod">
-          <ac:chgData name="Matthieu De Mari" userId="dfb708c9-d8dc-439f-9a3b-c772bf4a311c" providerId="ADAL" clId="{81E9B007-0C2C-493E-9B93-55A62C9C1F12}" dt="2026-01-12T06:09:02.413" v="26" actId="20577"/>
-          <ac:spMkLst>
-            <pc:docMk/>
-            <pc:sldMk cId="2917324732" sldId="760"/>
-            <ac:spMk id="2" creationId="{3F88AB3E-DF60-4411-7415-7A8708334829}"/>
-          </ac:spMkLst>
-        </pc:spChg>
-        <pc:spChg chg="mod">
-          <ac:chgData name="Matthieu De Mari" userId="dfb708c9-d8dc-439f-9a3b-c772bf4a311c" providerId="ADAL" clId="{81E9B007-0C2C-493E-9B93-55A62C9C1F12}" dt="2026-01-12T06:09:08.573" v="27" actId="20577"/>
-          <ac:spMkLst>
-            <pc:docMk/>
-            <pc:sldMk cId="2917324732" sldId="760"/>
-            <ac:spMk id="3" creationId="{65B58308-C101-BC04-E972-00C74DE5080B}"/>
-          </ac:spMkLst>
-        </pc:spChg>
-      </pc:sldChg>
-      <pc:sldChg chg="add">
-        <pc:chgData name="Matthieu De Mari" userId="dfb708c9-d8dc-439f-9a3b-c772bf4a311c" providerId="ADAL" clId="{81E9B007-0C2C-493E-9B93-55A62C9C1F12}" dt="2026-01-12T06:16:42.750" v="214"/>
-        <pc:sldMkLst>
-          <pc:docMk/>
-          <pc:sldMk cId="3339699406" sldId="761"/>
-        </pc:sldMkLst>
-      </pc:sldChg>
-      <pc:sldChg chg="add del">
-        <pc:chgData name="Matthieu De Mari" userId="dfb708c9-d8dc-439f-9a3b-c772bf4a311c" providerId="ADAL" clId="{81E9B007-0C2C-493E-9B93-55A62C9C1F12}" dt="2026-01-12T06:16:59.941" v="221" actId="47"/>
-        <pc:sldMkLst>
-          <pc:docMk/>
-          <pc:sldMk cId="1546007078" sldId="762"/>
-        </pc:sldMkLst>
-      </pc:sldChg>
-      <pc:sldChg chg="add">
-        <pc:chgData name="Matthieu De Mari" userId="dfb708c9-d8dc-439f-9a3b-c772bf4a311c" providerId="ADAL" clId="{81E9B007-0C2C-493E-9B93-55A62C9C1F12}" dt="2026-01-12T06:16:42.750" v="214"/>
-        <pc:sldMkLst>
-          <pc:docMk/>
-          <pc:sldMk cId="2580175991" sldId="763"/>
-        </pc:sldMkLst>
-      </pc:sldChg>
-      <pc:sldChg chg="add del">
-        <pc:chgData name="Matthieu De Mari" userId="dfb708c9-d8dc-439f-9a3b-c772bf4a311c" providerId="ADAL" clId="{81E9B007-0C2C-493E-9B93-55A62C9C1F12}" dt="2026-01-12T06:17:47.361" v="224" actId="47"/>
-        <pc:sldMkLst>
-          <pc:docMk/>
-          <pc:sldMk cId="1879463264" sldId="764"/>
-        </pc:sldMkLst>
-      </pc:sldChg>
-      <pc:sldChg chg="add">
-        <pc:chgData name="Matthieu De Mari" userId="dfb708c9-d8dc-439f-9a3b-c772bf4a311c" providerId="ADAL" clId="{81E9B007-0C2C-493E-9B93-55A62C9C1F12}" dt="2026-01-12T06:17:23.137" v="222"/>
-        <pc:sldMkLst>
-          <pc:docMk/>
-          <pc:sldMk cId="1996337912" sldId="765"/>
-        </pc:sldMkLst>
-      </pc:sldChg>
-      <pc:sldChg chg="addSp modSp add mod">
-        <pc:chgData name="Matthieu De Mari" userId="dfb708c9-d8dc-439f-9a3b-c772bf4a311c" providerId="ADAL" clId="{81E9B007-0C2C-493E-9B93-55A62C9C1F12}" dt="2026-01-12T06:19:25.091" v="416" actId="14100"/>
-        <pc:sldMkLst>
-          <pc:docMk/>
-          <pc:sldMk cId="1554669076" sldId="766"/>
-        </pc:sldMkLst>
-        <pc:spChg chg="add mod">
-          <ac:chgData name="Matthieu De Mari" userId="dfb708c9-d8dc-439f-9a3b-c772bf4a311c" providerId="ADAL" clId="{81E9B007-0C2C-493E-9B93-55A62C9C1F12}" dt="2026-01-12T06:18:56.371" v="413" actId="14100"/>
-          <ac:spMkLst>
-            <pc:docMk/>
-            <pc:sldMk cId="1554669076" sldId="766"/>
-            <ac:spMk id="4" creationId="{9DC8FF38-1770-9700-7271-5D73562BF213}"/>
-          </ac:spMkLst>
-        </pc:spChg>
-        <pc:spChg chg="add mod">
-          <ac:chgData name="Matthieu De Mari" userId="dfb708c9-d8dc-439f-9a3b-c772bf4a311c" providerId="ADAL" clId="{81E9B007-0C2C-493E-9B93-55A62C9C1F12}" dt="2026-01-12T06:19:25.091" v="416" actId="14100"/>
-          <ac:spMkLst>
-            <pc:docMk/>
-            <pc:sldMk cId="1554669076" sldId="766"/>
-            <ac:spMk id="5" creationId="{E5385868-5DE5-2E63-1F3B-5481EDBA7776}"/>
-          </ac:spMkLst>
-        </pc:spChg>
-      </pc:sldChg>
-      <pc:sldChg chg="modSp add mod">
-        <pc:chgData name="Matthieu De Mari" userId="dfb708c9-d8dc-439f-9a3b-c772bf4a311c" providerId="ADAL" clId="{81E9B007-0C2C-493E-9B93-55A62C9C1F12}" dt="2026-01-12T06:19:31.438" v="417" actId="14100"/>
-        <pc:sldMkLst>
-          <pc:docMk/>
-          <pc:sldMk cId="887698529" sldId="767"/>
-        </pc:sldMkLst>
-        <pc:spChg chg="mod">
-          <ac:chgData name="Matthieu De Mari" userId="dfb708c9-d8dc-439f-9a3b-c772bf4a311c" providerId="ADAL" clId="{81E9B007-0C2C-493E-9B93-55A62C9C1F12}" dt="2026-01-12T06:19:31.438" v="417" actId="14100"/>
-          <ac:spMkLst>
-            <pc:docMk/>
-            <pc:sldMk cId="887698529" sldId="767"/>
-            <ac:spMk id="4" creationId="{E4C24245-B4D0-5518-62ED-4B29EF65505E}"/>
-          </ac:spMkLst>
-        </pc:spChg>
-      </pc:sldChg>
-      <pc:sldChg chg="add">
-        <pc:chgData name="Matthieu De Mari" userId="dfb708c9-d8dc-439f-9a3b-c772bf4a311c" providerId="ADAL" clId="{81E9B007-0C2C-493E-9B93-55A62C9C1F12}" dt="2026-01-12T06:17:38.178" v="223"/>
-        <pc:sldMkLst>
-          <pc:docMk/>
-          <pc:sldMk cId="3101493777" sldId="768"/>
-        </pc:sldMkLst>
-      </pc:sldChg>
-      <pc:sldChg chg="add">
-        <pc:chgData name="Matthieu De Mari" userId="dfb708c9-d8dc-439f-9a3b-c772bf4a311c" providerId="ADAL" clId="{81E9B007-0C2C-493E-9B93-55A62C9C1F12}" dt="2026-01-12T06:20:02.171" v="418"/>
-        <pc:sldMkLst>
-          <pc:docMk/>
-          <pc:sldMk cId="2909899754" sldId="769"/>
-        </pc:sldMkLst>
-      </pc:sldChg>
-      <pc:sldChg chg="add">
-        <pc:chgData name="Matthieu De Mari" userId="dfb708c9-d8dc-439f-9a3b-c772bf4a311c" providerId="ADAL" clId="{81E9B007-0C2C-493E-9B93-55A62C9C1F12}" dt="2026-01-12T06:20:02.171" v="418"/>
-        <pc:sldMkLst>
-          <pc:docMk/>
-          <pc:sldMk cId="581091786" sldId="770"/>
-        </pc:sldMkLst>
-      </pc:sldChg>
-      <pc:sldChg chg="add">
-        <pc:chgData name="Matthieu De Mari" userId="dfb708c9-d8dc-439f-9a3b-c772bf4a311c" providerId="ADAL" clId="{81E9B007-0C2C-493E-9B93-55A62C9C1F12}" dt="2026-01-12T06:20:02.171" v="418"/>
-        <pc:sldMkLst>
-          <pc:docMk/>
-          <pc:sldMk cId="2768410648" sldId="771"/>
-        </pc:sldMkLst>
-      </pc:sldChg>
-      <pc:sldChg chg="add">
-        <pc:chgData name="Matthieu De Mari" userId="dfb708c9-d8dc-439f-9a3b-c772bf4a311c" providerId="ADAL" clId="{81E9B007-0C2C-493E-9B93-55A62C9C1F12}" dt="2026-01-12T06:20:02.171" v="418"/>
-        <pc:sldMkLst>
-          <pc:docMk/>
-          <pc:sldMk cId="2791462929" sldId="772"/>
-        </pc:sldMkLst>
-      </pc:sldChg>
-      <pc:sldChg chg="add">
-        <pc:chgData name="Matthieu De Mari" userId="dfb708c9-d8dc-439f-9a3b-c772bf4a311c" providerId="ADAL" clId="{81E9B007-0C2C-493E-9B93-55A62C9C1F12}" dt="2026-01-12T06:20:02.171" v="418"/>
-        <pc:sldMkLst>
-          <pc:docMk/>
-          <pc:sldMk cId="3544439591" sldId="773"/>
-        </pc:sldMkLst>
-      </pc:sldChg>
-      <pc:sldChg chg="add">
-        <pc:chgData name="Matthieu De Mari" userId="dfb708c9-d8dc-439f-9a3b-c772bf4a311c" providerId="ADAL" clId="{81E9B007-0C2C-493E-9B93-55A62C9C1F12}" dt="2026-01-12T06:20:02.171" v="418"/>
-        <pc:sldMkLst>
-          <pc:docMk/>
-          <pc:sldMk cId="2831341972" sldId="774"/>
-        </pc:sldMkLst>
-      </pc:sldChg>
-      <pc:sldChg chg="add del">
-        <pc:chgData name="Matthieu De Mari" userId="dfb708c9-d8dc-439f-9a3b-c772bf4a311c" providerId="ADAL" clId="{81E9B007-0C2C-493E-9B93-55A62C9C1F12}" dt="2026-01-12T06:21:00.968" v="423" actId="47"/>
-        <pc:sldMkLst>
-          <pc:docMk/>
-          <pc:sldMk cId="3029045816" sldId="781"/>
-        </pc:sldMkLst>
-      </pc:sldChg>
-      <pc:sldChg chg="modSp add mod">
-        <pc:chgData name="Matthieu De Mari" userId="dfb708c9-d8dc-439f-9a3b-c772bf4a311c" providerId="ADAL" clId="{81E9B007-0C2C-493E-9B93-55A62C9C1F12}" dt="2026-01-12T06:21:11.929" v="455" actId="20577"/>
-        <pc:sldMkLst>
-          <pc:docMk/>
-          <pc:sldMk cId="278531271" sldId="782"/>
-        </pc:sldMkLst>
-        <pc:spChg chg="mod">
-          <ac:chgData name="Matthieu De Mari" userId="dfb708c9-d8dc-439f-9a3b-c772bf4a311c" providerId="ADAL" clId="{81E9B007-0C2C-493E-9B93-55A62C9C1F12}" dt="2026-01-12T06:21:11.929" v="455" actId="20577"/>
-          <ac:spMkLst>
-            <pc:docMk/>
-            <pc:sldMk cId="278531271" sldId="782"/>
-            <ac:spMk id="6" creationId="{5282BC02-8C8A-BDB1-A192-B4E530ACD8B1}"/>
-          </ac:spMkLst>
-        </pc:spChg>
-      </pc:sldChg>
-      <pc:sldChg chg="modSp mod">
-        <pc:chgData name="Matthieu De Mari" userId="dfb708c9-d8dc-439f-9a3b-c772bf4a311c" providerId="ADAL" clId="{81E9B007-0C2C-493E-9B93-55A62C9C1F12}" dt="2026-01-12T06:23:12.831" v="462"/>
-        <pc:sldMkLst>
-          <pc:docMk/>
-          <pc:sldMk cId="2670805330" sldId="783"/>
-        </pc:sldMkLst>
-        <pc:spChg chg="mod">
-          <ac:chgData name="Matthieu De Mari" userId="dfb708c9-d8dc-439f-9a3b-c772bf4a311c" providerId="ADAL" clId="{81E9B007-0C2C-493E-9B93-55A62C9C1F12}" dt="2026-01-12T06:23:12.831" v="462"/>
-          <ac:spMkLst>
-            <pc:docMk/>
-            <pc:sldMk cId="2670805330" sldId="783"/>
-            <ac:spMk id="2" creationId="{3F88AB3E-DF60-4411-7415-7A8708334829}"/>
-          </ac:spMkLst>
-        </pc:spChg>
-        <pc:spChg chg="mod">
-          <ac:chgData name="Matthieu De Mari" userId="dfb708c9-d8dc-439f-9a3b-c772bf4a311c" providerId="ADAL" clId="{81E9B007-0C2C-493E-9B93-55A62C9C1F12}" dt="2026-01-12T06:23:05.973" v="460" actId="11"/>
-          <ac:spMkLst>
-            <pc:docMk/>
-            <pc:sldMk cId="2670805330" sldId="783"/>
-            <ac:spMk id="3" creationId="{65B58308-C101-BC04-E972-00C74DE5080B}"/>
-          </ac:spMkLst>
-        </pc:spChg>
-      </pc:sldChg>
-      <pc:sldChg chg="modSp del mod">
-        <pc:chgData name="Matthieu De Mari" userId="dfb708c9-d8dc-439f-9a3b-c772bf4a311c" providerId="ADAL" clId="{81E9B007-0C2C-493E-9B93-55A62C9C1F12}" dt="2026-01-12T06:23:07.927" v="461" actId="47"/>
-        <pc:sldMkLst>
-          <pc:docMk/>
-          <pc:sldMk cId="636279122" sldId="784"/>
-        </pc:sldMkLst>
-        <pc:spChg chg="mod">
-          <ac:chgData name="Matthieu De Mari" userId="dfb708c9-d8dc-439f-9a3b-c772bf4a311c" providerId="ADAL" clId="{81E9B007-0C2C-493E-9B93-55A62C9C1F12}" dt="2026-01-12T06:22:49.579" v="458" actId="21"/>
-          <ac:spMkLst>
-            <pc:docMk/>
-            <pc:sldMk cId="636279122" sldId="784"/>
-            <ac:spMk id="3" creationId="{65B58308-C101-BC04-E972-00C74DE5080B}"/>
-          </ac:spMkLst>
-        </pc:spChg>
-      </pc:sldChg>
-      <pc:sldChg chg="add">
-        <pc:chgData name="Matthieu De Mari" userId="dfb708c9-d8dc-439f-9a3b-c772bf4a311c" providerId="ADAL" clId="{81E9B007-0C2C-493E-9B93-55A62C9C1F12}" dt="2026-01-12T06:20:35.075" v="419"/>
-        <pc:sldMkLst>
-          <pc:docMk/>
-          <pc:sldMk cId="2116083586" sldId="786"/>
-        </pc:sldMkLst>
-      </pc:sldChg>
-      <pc:sldChg chg="del">
-        <pc:chgData name="Matthieu De Mari" userId="dfb708c9-d8dc-439f-9a3b-c772bf4a311c" providerId="ADAL" clId="{81E9B007-0C2C-493E-9B93-55A62C9C1F12}" dt="2026-01-12T06:14:36.776" v="213" actId="47"/>
-        <pc:sldMkLst>
-          <pc:docMk/>
-          <pc:sldMk cId="2509505199" sldId="786"/>
-        </pc:sldMkLst>
-      </pc:sldChg>
-      <pc:sldChg chg="modSp mod">
-        <pc:chgData name="Matthieu De Mari" userId="dfb708c9-d8dc-439f-9a3b-c772bf4a311c" providerId="ADAL" clId="{81E9B007-0C2C-493E-9B93-55A62C9C1F12}" dt="2025-12-18T22:20:21.245" v="2" actId="20577"/>
-        <pc:sldMkLst>
-          <pc:docMk/>
-          <pc:sldMk cId="4225424130" sldId="787"/>
-        </pc:sldMkLst>
-        <pc:spChg chg="mod">
-          <ac:chgData name="Matthieu De Mari" userId="dfb708c9-d8dc-439f-9a3b-c772bf4a311c" providerId="ADAL" clId="{81E9B007-0C2C-493E-9B93-55A62C9C1F12}" dt="2025-12-18T22:20:21.245" v="2" actId="20577"/>
-          <ac:spMkLst>
-            <pc:docMk/>
-            <pc:sldMk cId="4225424130" sldId="787"/>
-            <ac:spMk id="3" creationId="{811BFAB2-CE03-4B19-15B7-5D788C13B2FA}"/>
-          </ac:spMkLst>
-        </pc:spChg>
-      </pc:sldChg>
-      <pc:sldChg chg="add">
-        <pc:chgData name="Matthieu De Mari" userId="dfb708c9-d8dc-439f-9a3b-c772bf4a311c" providerId="ADAL" clId="{81E9B007-0C2C-493E-9B93-55A62C9C1F12}" dt="2026-01-12T06:16:42.750" v="214"/>
-        <pc:sldMkLst>
-          <pc:docMk/>
-          <pc:sldMk cId="1002846102" sldId="788"/>
-        </pc:sldMkLst>
       </pc:sldChg>
     </pc:docChg>
   </pc:docChgLst>
@@ -848,7 +446,7 @@
           <a:p>
             <a:fld id="{61478373-EB31-4867-8CF0-FA31364748A5}" type="datetimeFigureOut">
               <a:rPr lang="en-GB" smtClean="0"/>
-              <a:t>12/01/2026</a:t>
+              <a:t>15/03/2026</a:t>
             </a:fld>
             <a:endParaRPr lang="en-GB"/>
           </a:p>
@@ -1265,7 +863,7 @@
           <a:p>
             <a:fld id="{E85DF616-B21E-4EF6-A6A5-95E2FB3EB1A1}" type="datetimeFigureOut">
               <a:rPr lang="en-GB" smtClean="0"/>
-              <a:t>12/01/2026</a:t>
+              <a:t>15/03/2026</a:t>
             </a:fld>
             <a:endParaRPr lang="en-GB"/>
           </a:p>
@@ -1465,7 +1063,7 @@
           <a:p>
             <a:fld id="{E85DF616-B21E-4EF6-A6A5-95E2FB3EB1A1}" type="datetimeFigureOut">
               <a:rPr lang="en-GB" smtClean="0"/>
-              <a:t>12/01/2026</a:t>
+              <a:t>15/03/2026</a:t>
             </a:fld>
             <a:endParaRPr lang="en-GB"/>
           </a:p>
@@ -1675,7 +1273,7 @@
           <a:p>
             <a:fld id="{E85DF616-B21E-4EF6-A6A5-95E2FB3EB1A1}" type="datetimeFigureOut">
               <a:rPr lang="en-GB" smtClean="0"/>
-              <a:t>12/01/2026</a:t>
+              <a:t>15/03/2026</a:t>
             </a:fld>
             <a:endParaRPr lang="en-GB"/>
           </a:p>
@@ -1875,7 +1473,7 @@
           <a:p>
             <a:fld id="{E85DF616-B21E-4EF6-A6A5-95E2FB3EB1A1}" type="datetimeFigureOut">
               <a:rPr lang="en-GB" smtClean="0"/>
-              <a:t>12/01/2026</a:t>
+              <a:t>15/03/2026</a:t>
             </a:fld>
             <a:endParaRPr lang="en-GB"/>
           </a:p>
@@ -2151,7 +1749,7 @@
           <a:p>
             <a:fld id="{E85DF616-B21E-4EF6-A6A5-95E2FB3EB1A1}" type="datetimeFigureOut">
               <a:rPr lang="en-GB" smtClean="0"/>
-              <a:t>12/01/2026</a:t>
+              <a:t>15/03/2026</a:t>
             </a:fld>
             <a:endParaRPr lang="en-GB"/>
           </a:p>
@@ -2419,7 +2017,7 @@
           <a:p>
             <a:fld id="{E85DF616-B21E-4EF6-A6A5-95E2FB3EB1A1}" type="datetimeFigureOut">
               <a:rPr lang="en-GB" smtClean="0"/>
-              <a:t>12/01/2026</a:t>
+              <a:t>15/03/2026</a:t>
             </a:fld>
             <a:endParaRPr lang="en-GB"/>
           </a:p>
@@ -2834,7 +2432,7 @@
           <a:p>
             <a:fld id="{E85DF616-B21E-4EF6-A6A5-95E2FB3EB1A1}" type="datetimeFigureOut">
               <a:rPr lang="en-GB" smtClean="0"/>
-              <a:t>12/01/2026</a:t>
+              <a:t>15/03/2026</a:t>
             </a:fld>
             <a:endParaRPr lang="en-GB"/>
           </a:p>
@@ -2976,7 +2574,7 @@
           <a:p>
             <a:fld id="{E85DF616-B21E-4EF6-A6A5-95E2FB3EB1A1}" type="datetimeFigureOut">
               <a:rPr lang="en-GB" smtClean="0"/>
-              <a:t>12/01/2026</a:t>
+              <a:t>15/03/2026</a:t>
             </a:fld>
             <a:endParaRPr lang="en-GB"/>
           </a:p>
@@ -3089,7 +2687,7 @@
           <a:p>
             <a:fld id="{E85DF616-B21E-4EF6-A6A5-95E2FB3EB1A1}" type="datetimeFigureOut">
               <a:rPr lang="en-GB" smtClean="0"/>
-              <a:t>12/01/2026</a:t>
+              <a:t>15/03/2026</a:t>
             </a:fld>
             <a:endParaRPr lang="en-GB"/>
           </a:p>
@@ -3402,7 +3000,7 @@
           <a:p>
             <a:fld id="{E85DF616-B21E-4EF6-A6A5-95E2FB3EB1A1}" type="datetimeFigureOut">
               <a:rPr lang="en-GB" smtClean="0"/>
-              <a:t>12/01/2026</a:t>
+              <a:t>15/03/2026</a:t>
             </a:fld>
             <a:endParaRPr lang="en-GB"/>
           </a:p>
@@ -3691,7 +3289,7 @@
           <a:p>
             <a:fld id="{E85DF616-B21E-4EF6-A6A5-95E2FB3EB1A1}" type="datetimeFigureOut">
               <a:rPr lang="en-GB" smtClean="0"/>
-              <a:t>12/01/2026</a:t>
+              <a:t>15/03/2026</a:t>
             </a:fld>
             <a:endParaRPr lang="en-GB"/>
           </a:p>
@@ -3934,7 +3532,7 @@
           <a:p>
             <a:fld id="{E85DF616-B21E-4EF6-A6A5-95E2FB3EB1A1}" type="datetimeFigureOut">
               <a:rPr lang="en-GB" smtClean="0"/>
-              <a:t>12/01/2026</a:t>
+              <a:t>15/03/2026</a:t>
             </a:fld>
             <a:endParaRPr lang="en-GB"/>
           </a:p>
@@ -8942,7 +8540,7 @@
         </p:spPr>
         <p:txBody>
           <a:bodyPr>
-            <a:normAutofit fontScale="92500" lnSpcReduction="20000"/>
+            <a:normAutofit/>
           </a:bodyPr>
           <a:lstStyle/>
           <a:p>
@@ -8978,7 +8576,7 @@
             </a:r>
             <a:r>
               <a:rPr lang="en-GB" dirty="0"/>
-              <a:t> method will transfer to the best device available for computation (device variable was defined earlier, when we checked for </a:t>
+              <a:t> method will transfer to the given device for computation (device variable was typically defined earlier, when we checked for </a:t>
             </a:r>
             <a:r>
               <a:rPr lang="en-GB" dirty="0" err="1"/>
@@ -8995,48 +8593,6 @@
             <a:r>
               <a:rPr lang="en-GB" dirty="0"/>
               <a:t>).</a:t>
-            </a:r>
-          </a:p>
-          <a:p>
-            <a:pPr>
-              <a:buFont typeface="Arial" panose="020B0604020202020204" pitchFamily="34" charset="0"/>
-              <a:buChar char="•"/>
-            </a:pPr>
-            <a:r>
-              <a:rPr lang="en-GB" dirty="0"/>
-              <a:t>Using </a:t>
-            </a:r>
-            <a:r>
-              <a:rPr lang="en-GB" b="1" dirty="0"/>
-              <a:t>.</a:t>
-            </a:r>
-            <a:r>
-              <a:rPr lang="en-GB" b="1" dirty="0" err="1"/>
-              <a:t>cpu</a:t>
-            </a:r>
-            <a:r>
-              <a:rPr lang="en-GB" b="1" dirty="0"/>
-              <a:t>()</a:t>
-            </a:r>
-            <a:r>
-              <a:rPr lang="en-GB" dirty="0"/>
-              <a:t> or </a:t>
-            </a:r>
-            <a:r>
-              <a:rPr lang="en-GB" b="1" dirty="0"/>
-              <a:t>.</a:t>
-            </a:r>
-            <a:r>
-              <a:rPr lang="en-GB" b="1" dirty="0" err="1"/>
-              <a:t>cuda</a:t>
-            </a:r>
-            <a:r>
-              <a:rPr lang="en-GB" b="1" dirty="0"/>
-              <a:t>()</a:t>
-            </a:r>
-            <a:r>
-              <a:rPr lang="en-GB" dirty="0"/>
-              <a:t> will force transfer to the CPU or CUDA respectively. Note that it might fail if your machine is not CUDA compatible.</a:t>
             </a:r>
           </a:p>
           <a:p>
@@ -9068,12 +8624,50 @@
         </p:spPr>
         <p:txBody>
           <a:bodyPr>
-            <a:normAutofit fontScale="92500" lnSpcReduction="20000"/>
+            <a:normAutofit/>
           </a:bodyPr>
           <a:lstStyle/>
           <a:p>
             <a:r>
               <a:rPr lang="en-GB" dirty="0"/>
+              <a:t>Using </a:t>
+            </a:r>
+            <a:r>
+              <a:rPr lang="en-GB" b="1" dirty="0"/>
+              <a:t>.</a:t>
+            </a:r>
+            <a:r>
+              <a:rPr lang="en-GB" b="1" dirty="0" err="1"/>
+              <a:t>cpu</a:t>
+            </a:r>
+            <a:r>
+              <a:rPr lang="en-GB" b="1" dirty="0"/>
+              <a:t>()</a:t>
+            </a:r>
+            <a:r>
+              <a:rPr lang="en-GB" dirty="0"/>
+              <a:t> or </a:t>
+            </a:r>
+            <a:r>
+              <a:rPr lang="en-GB" b="1" dirty="0"/>
+              <a:t>.</a:t>
+            </a:r>
+            <a:r>
+              <a:rPr lang="en-GB" b="1" dirty="0" err="1"/>
+              <a:t>cuda</a:t>
+            </a:r>
+            <a:r>
+              <a:rPr lang="en-GB" b="1" dirty="0"/>
+              <a:t>()</a:t>
+            </a:r>
+            <a:r>
+              <a:rPr lang="en-GB" dirty="0"/>
+              <a:t> will force transfer to the CPU or CUDA respectively. Note that it might fail if your machine is not CUDA compatible.</a:t>
+            </a:r>
+          </a:p>
+          <a:p>
+            <a:r>
+              <a:rPr lang="en-GB" dirty="0"/>
               <a:t>In doubt, you can check the </a:t>
             </a:r>
             <a:r>
@@ -9082,7 +8676,7 @@
             </a:r>
             <a:r>
               <a:rPr lang="en-GB" dirty="0"/>
-              <a:t> attribute of your tensors to find where their computations will occur.</a:t>
+              <a:t> attribute of your tensors.</a:t>
             </a:r>
           </a:p>
         </p:txBody>
@@ -9109,7 +8703,7 @@
         </p:blipFill>
         <p:spPr>
           <a:xfrm>
-            <a:off x="6486769" y="4770077"/>
+            <a:off x="6357025" y="4892011"/>
             <a:ext cx="5497546" cy="1722798"/>
           </a:xfrm>
           <a:prstGeom prst="rect">
@@ -10095,7 +9689,15 @@
             </a:r>
             <a:r>
               <a:rPr lang="en-GB" dirty="0"/>
-              <a:t> version are:</a:t>
+              <a:t> version of </a:t>
+            </a:r>
+            <a:r>
+              <a:rPr lang="en-GB"/>
+              <a:t>our shallow neural network </a:t>
+            </a:r>
+            <a:r>
+              <a:rPr lang="en-GB" dirty="0"/>
+              <a:t>are:</a:t>
             </a:r>
           </a:p>
           <a:p>

--- a/Day 2 Part 2/D2P2.pptx
+++ b/Day 2 Part 2/D2P2.pptx
@@ -296,23 +296,30 @@
 </p:presentation>
 </file>
 
-<file path=ppt/revisionInfo.xml><?xml version="1.0" encoding="utf-8"?>
-<p1510:revInfo xmlns:a="http://schemas.openxmlformats.org/drawingml/2006/main" xmlns:r="http://schemas.openxmlformats.org/officeDocument/2006/relationships" xmlns:p1510="http://schemas.microsoft.com/office/powerpoint/2015/10/main">
-  <p1510:revLst>
-    <p1510:client id="{ADB41970-3D76-44B5-A3FE-07274F98D8DC}" v="1" dt="2026-03-15T14:25:37.795"/>
-  </p1510:revLst>
-</p1510:revInfo>
-</file>
-
 <file path=ppt/changesInfos/changesInfo1.xml><?xml version="1.0" encoding="utf-8"?>
 <pc:chgInfo xmlns:a="http://schemas.openxmlformats.org/drawingml/2006/main" xmlns:r="http://schemas.openxmlformats.org/officeDocument/2006/relationships" xmlns:ac="http://schemas.microsoft.com/office/drawing/2013/main/command" xmlns:pc="http://schemas.microsoft.com/office/powerpoint/2013/main/command">
   <pc:docChgLst>
     <pc:chgData name="Matthieu De Mari" userId="dfb708c9-d8dc-439f-9a3b-c772bf4a311c" providerId="ADAL" clId="{81E9B007-0C2C-493E-9B93-55A62C9C1F12}"/>
     <pc:docChg chg="undo custSel addSld delSld modSld delSection modSection">
-      <pc:chgData name="Matthieu De Mari" userId="dfb708c9-d8dc-439f-9a3b-c772bf4a311c" providerId="ADAL" clId="{81E9B007-0C2C-493E-9B93-55A62C9C1F12}" dt="2026-03-15T14:26:11.675" v="545" actId="20577"/>
+      <pc:chgData name="Matthieu De Mari" userId="dfb708c9-d8dc-439f-9a3b-c772bf4a311c" providerId="ADAL" clId="{81E9B007-0C2C-493E-9B93-55A62C9C1F12}" dt="2026-03-27T08:33:51.283" v="603" actId="20577"/>
       <pc:docMkLst>
         <pc:docMk/>
       </pc:docMkLst>
+      <pc:sldChg chg="modSp mod">
+        <pc:chgData name="Matthieu De Mari" userId="dfb708c9-d8dc-439f-9a3b-c772bf4a311c" providerId="ADAL" clId="{81E9B007-0C2C-493E-9B93-55A62C9C1F12}" dt="2026-03-27T03:23:52.839" v="602" actId="20577"/>
+        <pc:sldMkLst>
+          <pc:docMk/>
+          <pc:sldMk cId="1921397945" sldId="383"/>
+        </pc:sldMkLst>
+        <pc:spChg chg="mod">
+          <ac:chgData name="Matthieu De Mari" userId="dfb708c9-d8dc-439f-9a3b-c772bf4a311c" providerId="ADAL" clId="{81E9B007-0C2C-493E-9B93-55A62C9C1F12}" dt="2026-03-27T03:23:52.839" v="602" actId="20577"/>
+          <ac:spMkLst>
+            <pc:docMk/>
+            <pc:sldMk cId="1921397945" sldId="383"/>
+            <ac:spMk id="3" creationId="{4E3EB5A2-1EBE-6555-85E5-4CA6DEF3845D}"/>
+          </ac:spMkLst>
+        </pc:spChg>
+      </pc:sldChg>
       <pc:sldChg chg="modSp mod">
         <pc:chgData name="Matthieu De Mari" userId="dfb708c9-d8dc-439f-9a3b-c772bf4a311c" providerId="ADAL" clId="{81E9B007-0C2C-493E-9B93-55A62C9C1F12}" dt="2026-03-15T14:25:49.806" v="511" actId="1076"/>
         <pc:sldMkLst>
@@ -359,6 +366,21 @@
           </ac:spMkLst>
         </pc:spChg>
       </pc:sldChg>
+      <pc:sldChg chg="modSp mod">
+        <pc:chgData name="Matthieu De Mari" userId="dfb708c9-d8dc-439f-9a3b-c772bf4a311c" providerId="ADAL" clId="{81E9B007-0C2C-493E-9B93-55A62C9C1F12}" dt="2026-03-27T08:33:51.283" v="603" actId="20577"/>
+        <pc:sldMkLst>
+          <pc:docMk/>
+          <pc:sldMk cId="557429466" sldId="785"/>
+        </pc:sldMkLst>
+        <pc:spChg chg="mod">
+          <ac:chgData name="Matthieu De Mari" userId="dfb708c9-d8dc-439f-9a3b-c772bf4a311c" providerId="ADAL" clId="{81E9B007-0C2C-493E-9B93-55A62C9C1F12}" dt="2026-03-27T08:33:51.283" v="603" actId="20577"/>
+          <ac:spMkLst>
+            <pc:docMk/>
+            <pc:sldMk cId="557429466" sldId="785"/>
+            <ac:spMk id="3" creationId="{65399E50-9E84-8D67-B55F-073C06C3D10E}"/>
+          </ac:spMkLst>
+        </pc:spChg>
+      </pc:sldChg>
     </pc:docChg>
   </pc:docChgLst>
 </pc:chgInfo>
@@ -446,7 +468,7 @@
           <a:p>
             <a:fld id="{61478373-EB31-4867-8CF0-FA31364748A5}" type="datetimeFigureOut">
               <a:rPr lang="en-GB" smtClean="0"/>
-              <a:t>15/03/2026</a:t>
+              <a:t>27/03/2026</a:t>
             </a:fld>
             <a:endParaRPr lang="en-GB"/>
           </a:p>
@@ -863,7 +885,7 @@
           <a:p>
             <a:fld id="{E85DF616-B21E-4EF6-A6A5-95E2FB3EB1A1}" type="datetimeFigureOut">
               <a:rPr lang="en-GB" smtClean="0"/>
-              <a:t>15/03/2026</a:t>
+              <a:t>27/03/2026</a:t>
             </a:fld>
             <a:endParaRPr lang="en-GB"/>
           </a:p>
@@ -1063,7 +1085,7 @@
           <a:p>
             <a:fld id="{E85DF616-B21E-4EF6-A6A5-95E2FB3EB1A1}" type="datetimeFigureOut">
               <a:rPr lang="en-GB" smtClean="0"/>
-              <a:t>15/03/2026</a:t>
+              <a:t>27/03/2026</a:t>
             </a:fld>
             <a:endParaRPr lang="en-GB"/>
           </a:p>
@@ -1273,7 +1295,7 @@
           <a:p>
             <a:fld id="{E85DF616-B21E-4EF6-A6A5-95E2FB3EB1A1}" type="datetimeFigureOut">
               <a:rPr lang="en-GB" smtClean="0"/>
-              <a:t>15/03/2026</a:t>
+              <a:t>27/03/2026</a:t>
             </a:fld>
             <a:endParaRPr lang="en-GB"/>
           </a:p>
@@ -1473,7 +1495,7 @@
           <a:p>
             <a:fld id="{E85DF616-B21E-4EF6-A6A5-95E2FB3EB1A1}" type="datetimeFigureOut">
               <a:rPr lang="en-GB" smtClean="0"/>
-              <a:t>15/03/2026</a:t>
+              <a:t>27/03/2026</a:t>
             </a:fld>
             <a:endParaRPr lang="en-GB"/>
           </a:p>
@@ -1749,7 +1771,7 @@
           <a:p>
             <a:fld id="{E85DF616-B21E-4EF6-A6A5-95E2FB3EB1A1}" type="datetimeFigureOut">
               <a:rPr lang="en-GB" smtClean="0"/>
-              <a:t>15/03/2026</a:t>
+              <a:t>27/03/2026</a:t>
             </a:fld>
             <a:endParaRPr lang="en-GB"/>
           </a:p>
@@ -2017,7 +2039,7 @@
           <a:p>
             <a:fld id="{E85DF616-B21E-4EF6-A6A5-95E2FB3EB1A1}" type="datetimeFigureOut">
               <a:rPr lang="en-GB" smtClean="0"/>
-              <a:t>15/03/2026</a:t>
+              <a:t>27/03/2026</a:t>
             </a:fld>
             <a:endParaRPr lang="en-GB"/>
           </a:p>
@@ -2432,7 +2454,7 @@
           <a:p>
             <a:fld id="{E85DF616-B21E-4EF6-A6A5-95E2FB3EB1A1}" type="datetimeFigureOut">
               <a:rPr lang="en-GB" smtClean="0"/>
-              <a:t>15/03/2026</a:t>
+              <a:t>27/03/2026</a:t>
             </a:fld>
             <a:endParaRPr lang="en-GB"/>
           </a:p>
@@ -2574,7 +2596,7 @@
           <a:p>
             <a:fld id="{E85DF616-B21E-4EF6-A6A5-95E2FB3EB1A1}" type="datetimeFigureOut">
               <a:rPr lang="en-GB" smtClean="0"/>
-              <a:t>15/03/2026</a:t>
+              <a:t>27/03/2026</a:t>
             </a:fld>
             <a:endParaRPr lang="en-GB"/>
           </a:p>
@@ -2687,7 +2709,7 @@
           <a:p>
             <a:fld id="{E85DF616-B21E-4EF6-A6A5-95E2FB3EB1A1}" type="datetimeFigureOut">
               <a:rPr lang="en-GB" smtClean="0"/>
-              <a:t>15/03/2026</a:t>
+              <a:t>27/03/2026</a:t>
             </a:fld>
             <a:endParaRPr lang="en-GB"/>
           </a:p>
@@ -3000,7 +3022,7 @@
           <a:p>
             <a:fld id="{E85DF616-B21E-4EF6-A6A5-95E2FB3EB1A1}" type="datetimeFigureOut">
               <a:rPr lang="en-GB" smtClean="0"/>
-              <a:t>15/03/2026</a:t>
+              <a:t>27/03/2026</a:t>
             </a:fld>
             <a:endParaRPr lang="en-GB"/>
           </a:p>
@@ -3289,7 +3311,7 @@
           <a:p>
             <a:fld id="{E85DF616-B21E-4EF6-A6A5-95E2FB3EB1A1}" type="datetimeFigureOut">
               <a:rPr lang="en-GB" smtClean="0"/>
-              <a:t>15/03/2026</a:t>
+              <a:t>27/03/2026</a:t>
             </a:fld>
             <a:endParaRPr lang="en-GB"/>
           </a:p>
@@ -3532,7 +3554,7 @@
           <a:p>
             <a:fld id="{E85DF616-B21E-4EF6-A6A5-95E2FB3EB1A1}" type="datetimeFigureOut">
               <a:rPr lang="en-GB" smtClean="0"/>
-              <a:t>15/03/2026</a:t>
+              <a:t>27/03/2026</a:t>
             </a:fld>
             <a:endParaRPr lang="en-GB"/>
           </a:p>
@@ -9081,20 +9103,17 @@
             </a:r>
             <a:r>
               <a:rPr lang="en-GB" b="1" dirty="0"/>
-              <a:t>Stochastic Mini-Batch gradient descent</a:t>
-            </a:r>
-            <a:r>
-              <a:rPr lang="en-GB" dirty="0"/>
-              <a:t>, with </a:t>
-            </a:r>
-            <a:r>
-              <a:rPr lang="en-GB" b="1" dirty="0"/>
-              <a:t>Adam</a:t>
-            </a:r>
-            <a:r>
-              <a:rPr lang="en-GB" dirty="0"/>
-              <a:t> as its optimizer,</a:t>
-            </a:r>
+              <a:t>simple gradient descent algorithm </a:t>
+            </a:r>
+            <a:r>
+              <a:rPr lang="en-GB" b="1"/>
+              <a:t>for updates</a:t>
+            </a:r>
+            <a:r>
+              <a:rPr lang="en-GB"/>
+              <a:t>,</a:t>
+            </a:r>
+            <a:endParaRPr lang="en-GB" dirty="0"/>
           </a:p>
           <a:p>
             <a:r>
@@ -16572,13 +16591,6 @@
             <a:r>
               <a:rPr lang="en-GB" dirty="0"/>
               <a:t>.</a:t>
-            </a:r>
-          </a:p>
-          <a:p>
-            <a:pPr lvl="1"/>
-            <a:r>
-              <a:rPr lang="en-GB" dirty="0"/>
-              <a:t>(More on this on Week 13!)</a:t>
             </a:r>
           </a:p>
           <a:p>
